--- a/system/Presentation.pptx
+++ b/system/Presentation.pptx
@@ -597,7 +597,7 @@
           <a:p>
             <a:fld id="{E80C50CD-E178-4744-9B35-B2F624D6C5E9}" type="datetimeFigureOut">
               <a:rPr lang="en-US" smtClean="0"/>
-              <a:t>3/30/2026</a:t>
+              <a:t>4/13/2026</a:t>
             </a:fld>
             <a:endParaRPr lang="en-US"/>
           </a:p>
@@ -937,7 +937,7 @@
             <a:fld id="{E80C50CD-E178-4744-9B35-B2F624D6C5E9}" type="datetimeFigureOut">
               <a:rPr lang="en-US" smtClean="0"/>
               <a:pPr/>
-              <a:t>3/30/2026</a:t>
+              <a:t>4/13/2026</a:t>
             </a:fld>
             <a:endParaRPr lang="en-US"/>
           </a:p>
@@ -1135,7 +1135,7 @@
             <a:fld id="{E80C50CD-E178-4744-9B35-B2F624D6C5E9}" type="datetimeFigureOut">
               <a:rPr lang="en-US" smtClean="0"/>
               <a:pPr/>
-              <a:t>3/30/2026</a:t>
+              <a:t>4/13/2026</a:t>
             </a:fld>
             <a:endParaRPr lang="en-US"/>
           </a:p>
@@ -1407,7 +1407,7 @@
             <a:fld id="{E80C50CD-E178-4744-9B35-B2F624D6C5E9}" type="datetimeFigureOut">
               <a:rPr lang="en-US" smtClean="0"/>
               <a:pPr/>
-              <a:t>3/30/2026</a:t>
+              <a:t>4/13/2026</a:t>
             </a:fld>
             <a:endParaRPr lang="en-US"/>
           </a:p>
@@ -1837,7 +1837,7 @@
             <a:fld id="{E80C50CD-E178-4744-9B35-B2F624D6C5E9}" type="datetimeFigureOut">
               <a:rPr lang="en-US" smtClean="0"/>
               <a:pPr/>
-              <a:t>3/30/2026</a:t>
+              <a:t>4/13/2026</a:t>
             </a:fld>
             <a:endParaRPr lang="en-US"/>
           </a:p>
@@ -2389,7 +2389,7 @@
             <a:fld id="{E80C50CD-E178-4744-9B35-B2F624D6C5E9}" type="datetimeFigureOut">
               <a:rPr lang="en-US" smtClean="0"/>
               <a:pPr/>
-              <a:t>3/30/2026</a:t>
+              <a:t>4/13/2026</a:t>
             </a:fld>
             <a:endParaRPr lang="en-US"/>
           </a:p>
@@ -3181,7 +3181,7 @@
             <a:fld id="{E80C50CD-E178-4744-9B35-B2F624D6C5E9}" type="datetimeFigureOut">
               <a:rPr lang="en-US" smtClean="0"/>
               <a:pPr/>
-              <a:t>3/30/2026</a:t>
+              <a:t>4/13/2026</a:t>
             </a:fld>
             <a:endParaRPr lang="en-US"/>
           </a:p>
@@ -3362,7 +3362,7 @@
             <a:fld id="{E80C50CD-E178-4744-9B35-B2F624D6C5E9}" type="datetimeFigureOut">
               <a:rPr lang="en-US" smtClean="0"/>
               <a:pPr/>
-              <a:t>3/30/2026</a:t>
+              <a:t>4/13/2026</a:t>
             </a:fld>
             <a:endParaRPr lang="en-US"/>
           </a:p>
@@ -3548,7 +3548,7 @@
             <a:fld id="{E80C50CD-E178-4744-9B35-B2F624D6C5E9}" type="datetimeFigureOut">
               <a:rPr lang="en-US" smtClean="0"/>
               <a:pPr/>
-              <a:t>3/30/2026</a:t>
+              <a:t>4/13/2026</a:t>
             </a:fld>
             <a:endParaRPr lang="en-US"/>
           </a:p>
@@ -3725,7 +3725,7 @@
           <a:p>
             <a:fld id="{E80C50CD-E178-4744-9B35-B2F624D6C5E9}" type="datetimeFigureOut">
               <a:rPr lang="en-US" smtClean="0"/>
-              <a:t>3/30/2026</a:t>
+              <a:t>4/13/2026</a:t>
             </a:fld>
             <a:endParaRPr lang="en-US"/>
           </a:p>
@@ -3901,7 +3901,7 @@
             <a:fld id="{E80C50CD-E178-4744-9B35-B2F624D6C5E9}" type="datetimeFigureOut">
               <a:rPr lang="en-US" smtClean="0"/>
               <a:pPr/>
-              <a:t>3/30/2026</a:t>
+              <a:t>4/13/2026</a:t>
             </a:fld>
             <a:endParaRPr lang="en-US"/>
           </a:p>
@@ -4152,7 +4152,7 @@
           <a:p>
             <a:fld id="{E80C50CD-E178-4744-9B35-B2F624D6C5E9}" type="datetimeFigureOut">
               <a:rPr lang="en-US" smtClean="0"/>
-              <a:t>3/30/2026</a:t>
+              <a:t>4/13/2026</a:t>
             </a:fld>
             <a:endParaRPr lang="en-US"/>
           </a:p>
@@ -4390,7 +4390,7 @@
             <a:fld id="{E80C50CD-E178-4744-9B35-B2F624D6C5E9}" type="datetimeFigureOut">
               <a:rPr lang="en-US" smtClean="0"/>
               <a:pPr/>
-              <a:t>3/30/2026</a:t>
+              <a:t>4/13/2026</a:t>
             </a:fld>
             <a:endParaRPr lang="en-US"/>
           </a:p>
@@ -4777,7 +4777,7 @@
             <a:fld id="{E80C50CD-E178-4744-9B35-B2F624D6C5E9}" type="datetimeFigureOut">
               <a:rPr lang="en-US" smtClean="0"/>
               <a:pPr/>
-              <a:t>3/30/2026</a:t>
+              <a:t>4/13/2026</a:t>
             </a:fld>
             <a:endParaRPr lang="en-US"/>
           </a:p>
@@ -4896,7 +4896,7 @@
           <a:p>
             <a:fld id="{E80C50CD-E178-4744-9B35-B2F624D6C5E9}" type="datetimeFigureOut">
               <a:rPr lang="en-US" smtClean="0"/>
-              <a:t>3/30/2026</a:t>
+              <a:t>4/13/2026</a:t>
             </a:fld>
             <a:endParaRPr lang="en-US"/>
           </a:p>
@@ -4991,7 +4991,7 @@
           <a:p>
             <a:fld id="{E80C50CD-E178-4744-9B35-B2F624D6C5E9}" type="datetimeFigureOut">
               <a:rPr lang="en-US" smtClean="0"/>
-              <a:t>3/30/2026</a:t>
+              <a:t>4/13/2026</a:t>
             </a:fld>
             <a:endParaRPr lang="en-US"/>
           </a:p>
@@ -5245,7 +5245,7 @@
             <a:fld id="{E80C50CD-E178-4744-9B35-B2F624D6C5E9}" type="datetimeFigureOut">
               <a:rPr lang="en-US" smtClean="0"/>
               <a:pPr/>
-              <a:t>3/30/2026</a:t>
+              <a:t>4/13/2026</a:t>
             </a:fld>
             <a:endParaRPr lang="en-US"/>
           </a:p>
@@ -5515,7 +5515,7 @@
           <a:p>
             <a:fld id="{E80C50CD-E178-4744-9B35-B2F624D6C5E9}" type="datetimeFigureOut">
               <a:rPr lang="en-US" smtClean="0"/>
-              <a:t>3/30/2026</a:t>
+              <a:t>4/13/2026</a:t>
             </a:fld>
             <a:endParaRPr lang="en-US"/>
           </a:p>
@@ -5940,7 +5940,7 @@
             <a:fld id="{E80C50CD-E178-4744-9B35-B2F624D6C5E9}" type="datetimeFigureOut">
               <a:rPr lang="en-US" smtClean="0"/>
               <a:pPr/>
-              <a:t>3/30/2026</a:t>
+              <a:t>4/13/2026</a:t>
             </a:fld>
             <a:endParaRPr lang="en-US"/>
           </a:p>
@@ -7033,8 +7033,8 @@
         </p:blipFill>
         <p:spPr>
           <a:xfrm>
-            <a:off x="7271962" y="691545"/>
-            <a:ext cx="4391095" cy="3053141"/>
+            <a:off x="7113016" y="471315"/>
+            <a:ext cx="4391095" cy="3343742"/>
           </a:xfrm>
           <a:prstGeom prst="rect">
             <a:avLst/>
@@ -7079,10 +7079,10 @@
       </p:sp>
       <p:pic>
         <p:nvPicPr>
-          <p:cNvPr id="11" name="Picture 10">
+          <p:cNvPr id="4" name="Picture 3" descr="A screenshot of a computer&#10;&#10;AI-generated content may be incorrect.">
             <a:extLst>
               <a:ext uri="{FF2B5EF4-FFF2-40B4-BE49-F238E27FC236}">
-                <a16:creationId xmlns:a16="http://schemas.microsoft.com/office/drawing/2014/main" id="{D1F8A008-ECD0-8C65-62FC-B6B4AFEFEAD8}"/>
+                <a16:creationId xmlns:a16="http://schemas.microsoft.com/office/drawing/2014/main" id="{BBE4E819-5974-EA2F-FC04-C4EE00EC86AC}"/>
               </a:ext>
             </a:extLst>
           </p:cNvPr>
@@ -7092,16 +7092,21 @@
           <p:nvPr/>
         </p:nvPicPr>
         <p:blipFill>
-          <a:blip r:embed="rId4"/>
-          <a:srcRect t="10030" r="3" b="3"/>
+          <a:blip r:embed="rId4">
+            <a:extLst>
+              <a:ext uri="{28A0092B-C50C-407E-A947-70E740481C1C}">
+                <a14:useLocalDpi xmlns:a14="http://schemas.microsoft.com/office/drawing/2010/main" val="0"/>
+              </a:ext>
+            </a:extLst>
+          </a:blip>
           <a:stretch>
             <a:fillRect/>
           </a:stretch>
         </p:blipFill>
         <p:spPr>
           <a:xfrm>
-            <a:off x="163398" y="691545"/>
-            <a:ext cx="6961087" cy="3053141"/>
+            <a:off x="231270" y="471315"/>
+            <a:ext cx="6663306" cy="3343742"/>
           </a:xfrm>
           <a:prstGeom prst="rect">
             <a:avLst/>
